--- a/index/designs/y8-l7/l4-pinyin-listening/l4-pinyin-listening.pptx
+++ b/index/designs/y8-l7/l4-pinyin-listening/l4-pinyin-listening.pptx
@@ -3493,9 +3493,6 @@
               </a:rPr>
               <a:t>Listen → </a:t>
             </a:r>
-            <a:pPr algn="l" indent="0" marL="0">
-              <a:buNone/>
-            </a:pPr>
             <a:r>
               <a:rPr lang="en-US" sz="1100" b="1" dirty="0">
                 <a:solidFill>
@@ -3507,9 +3504,6 @@
               </a:rPr>
               <a:t>tick one choice (A / B / C)</a:t>
             </a:r>
-            <a:pPr algn="l" indent="0" marL="0">
-              <a:buNone/>
-            </a:pPr>
             <a:r>
               <a:rPr lang="en-US" sz="1100" dirty="0">
                 <a:solidFill>
@@ -7027,12 +7021,6 @@
               </a:rPr>
               <a:t>📖 Category: </a:t>
             </a:r>
-            <a:pPr algn="l" indent="0" marL="0">
-              <a:lnSpc>
-                <a:spcPts val="1350"/>
-              </a:lnSpc>
-              <a:buNone/>
-            </a:pPr>
             <a:r>
               <a:rPr lang="en-US" sz="1000" b="1" dirty="0">
                 <a:solidFill>
@@ -7122,12 +7110,6 @@
               </a:rPr>
               <a:t>⛓ Add one word each — </a:t>
             </a:r>
-            <a:pPr algn="l" indent="0" marL="0">
-              <a:lnSpc>
-                <a:spcPts val="1350"/>
-              </a:lnSpc>
-              <a:buNone/>
-            </a:pPr>
             <a:r>
               <a:rPr lang="en-US" sz="1000" b="1" dirty="0">
                 <a:solidFill>
@@ -7217,12 +7199,6 @@
               </a:rPr>
               <a:t>⏱ </a:t>
             </a:r>
-            <a:pPr algn="l" indent="0" marL="0">
-              <a:lnSpc>
-                <a:spcPts val="1350"/>
-              </a:lnSpc>
-              <a:buNone/>
-            </a:pPr>
             <a:r>
               <a:rPr lang="en-US" sz="1000" b="1" dirty="0">
                 <a:solidFill>
@@ -7234,12 +7210,6 @@
               </a:rPr>
               <a:t>5 seconds</a:t>
             </a:r>
-            <a:pPr algn="l" indent="0" marL="0">
-              <a:lnSpc>
-                <a:spcPts val="1350"/>
-              </a:lnSpc>
-              <a:buNone/>
-            </a:pPr>
             <a:r>
               <a:rPr lang="en-US" sz="1000" dirty="0">
                 <a:solidFill>
@@ -9322,9 +9292,6 @@
               </a:rPr>
               <a:t>我每天唱歌</a:t>
             </a:r>
-            <a:pPr algn="l" indent="0" marL="0">
-              <a:buNone/>
-            </a:pPr>
             <a:r>
               <a:rPr lang="en-US" sz="1100" dirty="0">
                 <a:solidFill>
@@ -9336,9 +9303,6 @@
               </a:rPr>
               <a:t> </a:t>
             </a:r>
-            <a:pPr algn="l" indent="0" marL="0">
-              <a:buNone/>
-            </a:pPr>
             <a:r>
               <a:rPr lang="en-US" sz="1100" b="1" dirty="0">
                 <a:solidFill>
@@ -9350,9 +9314,6 @@
               </a:rPr>
               <a:t>+</a:t>
             </a:r>
-            <a:pPr algn="l" indent="0" marL="0">
-              <a:buNone/>
-            </a:pPr>
             <a:r>
               <a:rPr lang="en-US" sz="1100" dirty="0">
                 <a:solidFill>
@@ -9364,9 +9325,6 @@
               </a:rPr>
               <a:t> </a:t>
             </a:r>
-            <a:pPr algn="l" indent="0" marL="0">
-              <a:buNone/>
-            </a:pPr>
             <a:r>
               <a:rPr lang="en-US" sz="1100" b="1" dirty="0">
                 <a:solidFill>
@@ -9378,9 +9336,6 @@
               </a:rPr>
               <a:t>两个小时。</a:t>
             </a:r>
-            <a:pPr algn="l" indent="0" marL="0">
-              <a:buNone/>
-            </a:pPr>
             <a:r>
               <a:rPr lang="en-US" sz="1100" dirty="0">
                 <a:solidFill>
@@ -9392,9 +9347,6 @@
               </a:rPr>
               <a:t> </a:t>
             </a:r>
-            <a:pPr algn="l" indent="0" marL="0">
-              <a:buNone/>
-            </a:pPr>
             <a:r>
               <a:rPr lang="en-US" sz="900" dirty="0">
                 <a:solidFill>
@@ -11083,12 +11035,6 @@
               </a:rPr>
               <a:t>Write 2 Chinese words with </a:t>
             </a:r>
-            <a:pPr algn="l" indent="0" marL="0">
-              <a:spcAft>
-                <a:spcPts val="1000"/>
-              </a:spcAft>
-              <a:buNone/>
-            </a:pPr>
             <a:r>
               <a:rPr lang="en-US" sz="1200" b="1" dirty="0">
                 <a:solidFill>
@@ -11100,12 +11046,6 @@
               </a:rPr>
               <a:t>ao</a:t>
             </a:r>
-            <a:pPr algn="l" indent="0" marL="0">
-              <a:spcAft>
-                <a:spcPts val="1000"/>
-              </a:spcAft>
-              <a:buNone/>
-            </a:pPr>
             <a:r>
               <a:rPr lang="en-US" sz="1200" dirty="0">
                 <a:solidFill>
@@ -11117,12 +11057,6 @@
               </a:rPr>
               <a:t> and 2 with </a:t>
             </a:r>
-            <a:pPr algn="l" indent="0" marL="0">
-              <a:spcAft>
-                <a:spcPts val="1000"/>
-              </a:spcAft>
-              <a:buNone/>
-            </a:pPr>
             <a:r>
               <a:rPr lang="en-US" sz="1200" b="1" dirty="0">
                 <a:solidFill>
@@ -11134,12 +11068,6 @@
               </a:rPr>
               <a:t>ou</a:t>
             </a:r>
-            <a:pPr algn="l" indent="0" marL="0">
-              <a:spcAft>
-                <a:spcPts val="1000"/>
-              </a:spcAft>
-              <a:buNone/>
-            </a:pPr>
             <a:r>
               <a:rPr lang="en-US" sz="1200" dirty="0">
                 <a:solidFill>
@@ -13245,12 +13173,6 @@
               </a:rPr>
               <a:t>Next lesson: learn these </a:t>
             </a:r>
-            <a:pPr algn="l" indent="0" marL="0">
-              <a:lnSpc>
-                <a:spcPts val="1595"/>
-              </a:lnSpc>
-              <a:buNone/>
-            </a:pPr>
             <a:r>
               <a:rPr lang="en-US" sz="1100" b="1" dirty="0">
                 <a:solidFill>
@@ -13262,12 +13184,6 @@
               </a:rPr>
               <a:t>art vocab words</a:t>
             </a:r>
-            <a:pPr algn="l" indent="0" marL="0">
-              <a:lnSpc>
-                <a:spcPts val="1595"/>
-              </a:lnSpc>
-              <a:buNone/>
-            </a:pPr>
             <a:r>
               <a:rPr lang="en-US" sz="1100" dirty="0">
                 <a:solidFill>
@@ -13279,12 +13195,6 @@
               </a:rPr>
               <a:t> then read </a:t>
             </a:r>
-            <a:pPr algn="l" indent="0" marL="0">
-              <a:lnSpc>
-                <a:spcPts val="1595"/>
-              </a:lnSpc>
-              <a:buNone/>
-            </a:pPr>
             <a:r>
               <a:rPr lang="en-US" sz="1100" b="1" dirty="0">
                 <a:solidFill>
@@ -13296,12 +13206,6 @@
               </a:rPr>
               <a:t>Text 2</a:t>
             </a:r>
-            <a:pPr algn="l" indent="0" marL="0">
-              <a:lnSpc>
-                <a:spcPts val="1595"/>
-              </a:lnSpc>
-              <a:buNone/>
-            </a:pPr>
             <a:r>
               <a:rPr lang="en-US" sz="1100" dirty="0">
                 <a:solidFill>
@@ -14655,12 +14559,6 @@
               </a:rPr>
               <a:t>Many listening words contain </a:t>
             </a:r>
-            <a:pPr algn="l" indent="0" marL="0">
-              <a:lnSpc>
-                <a:spcPts val="1540"/>
-              </a:lnSpc>
-              <a:buNone/>
-            </a:pPr>
             <a:r>
               <a:rPr lang="en-US" sz="1100" b="1" dirty="0">
                 <a:solidFill>
@@ -14672,12 +14570,6 @@
               </a:rPr>
               <a:t>ao</a:t>
             </a:r>
-            <a:pPr algn="l" indent="0" marL="0">
-              <a:lnSpc>
-                <a:spcPts val="1540"/>
-              </a:lnSpc>
-              <a:buNone/>
-            </a:pPr>
             <a:r>
               <a:rPr lang="en-US" sz="1100" dirty="0">
                 <a:solidFill>
@@ -14689,12 +14581,6 @@
               </a:rPr>
               <a:t> or </a:t>
             </a:r>
-            <a:pPr algn="l" indent="0" marL="0">
-              <a:lnSpc>
-                <a:spcPts val="1540"/>
-              </a:lnSpc>
-              <a:buNone/>
-            </a:pPr>
             <a:r>
               <a:rPr lang="en-US" sz="1100" b="1" dirty="0">
                 <a:solidFill>
@@ -14706,12 +14592,6 @@
               </a:rPr>
               <a:t>ou</a:t>
             </a:r>
-            <a:pPr algn="l" indent="0" marL="0">
-              <a:lnSpc>
-                <a:spcPts val="1540"/>
-              </a:lnSpc>
-              <a:buNone/>
-            </a:pPr>
             <a:r>
               <a:rPr lang="en-US" sz="1100" dirty="0">
                 <a:solidFill>
@@ -14723,12 +14603,6 @@
               </a:rPr>
               <a:t> — like </a:t>
             </a:r>
-            <a:pPr algn="l" indent="0" marL="0">
-              <a:lnSpc>
-                <a:spcPts val="1540"/>
-              </a:lnSpc>
-              <a:buNone/>
-            </a:pPr>
             <a:r>
               <a:rPr lang="en-US" sz="1100" b="1" dirty="0">
                 <a:solidFill>
@@ -14740,12 +14614,6 @@
               </a:rPr>
               <a:t>爱好</a:t>
             </a:r>
-            <a:pPr algn="l" indent="0" marL="0">
-              <a:lnSpc>
-                <a:spcPts val="1540"/>
-              </a:lnSpc>
-              <a:buNone/>
-            </a:pPr>
             <a:r>
               <a:rPr lang="en-US" sz="1100" dirty="0">
                 <a:solidFill>
@@ -14757,12 +14625,6 @@
               </a:rPr>
               <a:t> and </a:t>
             </a:r>
-            <a:pPr algn="l" indent="0" marL="0">
-              <a:lnSpc>
-                <a:spcPts val="1540"/>
-              </a:lnSpc>
-              <a:buNone/>
-            </a:pPr>
             <a:r>
               <a:rPr lang="en-US" sz="1100" b="1" dirty="0">
                 <a:solidFill>
@@ -14774,12 +14636,6 @@
               </a:rPr>
               <a:t>好</a:t>
             </a:r>
-            <a:pPr algn="l" indent="0" marL="0">
-              <a:lnSpc>
-                <a:spcPts val="1540"/>
-              </a:lnSpc>
-              <a:buNone/>
-            </a:pPr>
             <a:r>
               <a:rPr lang="en-US" sz="1100" dirty="0">
                 <a:solidFill>
@@ -15267,12 +15123,6 @@
               </a:rPr>
               <a:t>We are learning to </a:t>
             </a:r>
-            <a:pPr algn="l" indent="0" marL="0">
-              <a:lnSpc>
-                <a:spcPts val="2025"/>
-              </a:lnSpc>
-              <a:buNone/>
-            </a:pPr>
             <a:r>
               <a:rPr lang="en-US" sz="1500" b="1" dirty="0">
                 <a:solidFill>
@@ -15284,12 +15134,6 @@
               </a:rPr>
               <a:t>distinguish ao and ou sounds</a:t>
             </a:r>
-            <a:pPr algn="l" indent="0" marL="0">
-              <a:lnSpc>
-                <a:spcPts val="2025"/>
-              </a:lnSpc>
-              <a:buNone/>
-            </a:pPr>
             <a:r>
               <a:rPr lang="en-US" sz="1500" dirty="0">
                 <a:solidFill>
@@ -15416,12 +15260,6 @@
               </a:rPr>
               <a:t>I can </a:t>
             </a:r>
-            <a:pPr algn="l" indent="0" marL="0">
-              <a:lnSpc>
-                <a:spcPts val="1820"/>
-              </a:lnSpc>
-              <a:buNone/>
-            </a:pPr>
             <a:r>
               <a:rPr lang="en-US" sz="1300" b="1" dirty="0">
                 <a:solidFill>
@@ -15433,12 +15271,6 @@
               </a:rPr>
               <a:t>hear the difference</a:t>
             </a:r>
-            <a:pPr algn="l" indent="0" marL="0">
-              <a:lnSpc>
-                <a:spcPts val="1820"/>
-              </a:lnSpc>
-              <a:buNone/>
-            </a:pPr>
             <a:r>
               <a:rPr lang="en-US" sz="1300" dirty="0">
                 <a:solidFill>
@@ -15450,12 +15282,6 @@
               </a:rPr>
               <a:t> between </a:t>
             </a:r>
-            <a:pPr algn="l" indent="0" marL="0">
-              <a:lnSpc>
-                <a:spcPts val="1820"/>
-              </a:lnSpc>
-              <a:buNone/>
-            </a:pPr>
             <a:r>
               <a:rPr lang="en-US" sz="1300" b="1" dirty="0">
                 <a:solidFill>
@@ -15467,12 +15293,6 @@
               </a:rPr>
               <a:t>ao</a:t>
             </a:r>
-            <a:pPr algn="l" indent="0" marL="0">
-              <a:lnSpc>
-                <a:spcPts val="1820"/>
-              </a:lnSpc>
-              <a:buNone/>
-            </a:pPr>
             <a:r>
               <a:rPr lang="en-US" sz="1300" dirty="0">
                 <a:solidFill>
@@ -15484,12 +15304,6 @@
               </a:rPr>
               <a:t> (like "aow") and </a:t>
             </a:r>
-            <a:pPr algn="l" indent="0" marL="0">
-              <a:lnSpc>
-                <a:spcPts val="1820"/>
-              </a:lnSpc>
-              <a:buNone/>
-            </a:pPr>
             <a:r>
               <a:rPr lang="en-US" sz="1300" b="1" dirty="0">
                 <a:solidFill>
@@ -15501,12 +15315,6 @@
               </a:rPr>
               <a:t>ou</a:t>
             </a:r>
-            <a:pPr algn="l" indent="0" marL="0">
-              <a:lnSpc>
-                <a:spcPts val="1820"/>
-              </a:lnSpc>
-              <a:buNone/>
-            </a:pPr>
             <a:r>
               <a:rPr lang="en-US" sz="1300" dirty="0">
                 <a:solidFill>
@@ -15633,12 +15441,6 @@
               </a:rPr>
               <a:t>I can </a:t>
             </a:r>
-            <a:pPr algn="l" indent="0" marL="0">
-              <a:lnSpc>
-                <a:spcPts val="1820"/>
-              </a:lnSpc>
-              <a:buNone/>
-            </a:pPr>
             <a:r>
               <a:rPr lang="en-US" sz="1300" b="1" dirty="0">
                 <a:solidFill>
@@ -15650,12 +15452,6 @@
               </a:rPr>
               <a:t>correctly identify</a:t>
             </a:r>
-            <a:pPr algn="l" indent="0" marL="0">
-              <a:lnSpc>
-                <a:spcPts val="1820"/>
-              </a:lnSpc>
-              <a:buNone/>
-            </a:pPr>
             <a:r>
               <a:rPr lang="en-US" sz="1300" dirty="0">
                 <a:solidFill>
@@ -15667,12 +15463,6 @@
               </a:rPr>
               <a:t> </a:t>
             </a:r>
-            <a:pPr algn="l" indent="0" marL="0">
-              <a:lnSpc>
-                <a:spcPts val="1820"/>
-              </a:lnSpc>
-              <a:buNone/>
-            </a:pPr>
             <a:r>
               <a:rPr lang="en-US" sz="1300" b="1" dirty="0">
                 <a:solidFill>
@@ -15684,12 +15474,6 @@
               </a:rPr>
               <a:t>ao</a:t>
             </a:r>
-            <a:pPr algn="l" indent="0" marL="0">
-              <a:lnSpc>
-                <a:spcPts val="1820"/>
-              </a:lnSpc>
-              <a:buNone/>
-            </a:pPr>
             <a:r>
               <a:rPr lang="en-US" sz="1300" dirty="0">
                 <a:solidFill>
@@ -15701,12 +15485,6 @@
               </a:rPr>
               <a:t> / </a:t>
             </a:r>
-            <a:pPr algn="l" indent="0" marL="0">
-              <a:lnSpc>
-                <a:spcPts val="1820"/>
-              </a:lnSpc>
-              <a:buNone/>
-            </a:pPr>
             <a:r>
               <a:rPr lang="en-US" sz="1300" b="1" dirty="0">
                 <a:solidFill>
@@ -15718,12 +15496,6 @@
               </a:rPr>
               <a:t>ou</a:t>
             </a:r>
-            <a:pPr algn="l" indent="0" marL="0">
-              <a:lnSpc>
-                <a:spcPts val="1820"/>
-              </a:lnSpc>
-              <a:buNone/>
-            </a:pPr>
             <a:r>
               <a:rPr lang="en-US" sz="1300" dirty="0">
                 <a:solidFill>
@@ -15735,12 +15507,6 @@
               </a:rPr>
               <a:t> when I hear them in </a:t>
             </a:r>
-            <a:pPr algn="l" indent="0" marL="0">
-              <a:lnSpc>
-                <a:spcPts val="1820"/>
-              </a:lnSpc>
-              <a:buNone/>
-            </a:pPr>
             <a:r>
               <a:rPr lang="en-US" sz="1300" b="1" dirty="0">
                 <a:solidFill>
@@ -15867,12 +15633,6 @@
               </a:rPr>
               <a:t>I can </a:t>
             </a:r>
-            <a:pPr algn="l" indent="0" marL="0">
-              <a:lnSpc>
-                <a:spcPts val="1820"/>
-              </a:lnSpc>
-              <a:buNone/>
-            </a:pPr>
             <a:r>
               <a:rPr lang="en-US" sz="1300" b="1" dirty="0">
                 <a:solidFill>
@@ -15884,12 +15644,6 @@
               </a:rPr>
               <a:t>follow spoken Chinese</a:t>
             </a:r>
-            <a:pPr algn="l" indent="0" marL="0">
-              <a:lnSpc>
-                <a:spcPts val="1820"/>
-              </a:lnSpc>
-              <a:buNone/>
-            </a:pPr>
             <a:r>
               <a:rPr lang="en-US" sz="1300" dirty="0">
                 <a:solidFill>
@@ -15901,12 +15655,6 @@
               </a:rPr>
               <a:t> to tick correct answers in a </a:t>
             </a:r>
-            <a:pPr algn="l" indent="0" marL="0">
-              <a:lnSpc>
-                <a:spcPts val="1820"/>
-              </a:lnSpc>
-              <a:buNone/>
-            </a:pPr>
             <a:r>
               <a:rPr lang="en-US" sz="1300" b="1" dirty="0">
                 <a:solidFill>
@@ -16461,12 +16209,6 @@
               </a:rPr>
               <a:t>like "ow" in </a:t>
             </a:r>
-            <a:pPr algn="ctr" indent="0" marL="0">
-              <a:spcAft>
-                <a:spcPts val="1000"/>
-              </a:spcAft>
-              <a:buNone/>
-            </a:pPr>
             <a:r>
               <a:rPr lang="en-US" sz="1000" b="1" i="1" dirty="0">
                 <a:solidFill>
@@ -17098,12 +16840,6 @@
               </a:rPr>
               <a:t>like "oh" in </a:t>
             </a:r>
-            <a:pPr algn="ctr" indent="0" marL="0">
-              <a:spcAft>
-                <a:spcPts val="1000"/>
-              </a:spcAft>
-              <a:buNone/>
-            </a:pPr>
             <a:r>
               <a:rPr lang="en-US" sz="1000" b="1" i="1" dirty="0">
                 <a:solidFill>
@@ -17603,9 +17339,6 @@
               </a:rPr>
               <a:t>Teacher says — students </a:t>
             </a:r>
-            <a:pPr algn="ctr" indent="0" marL="0">
-              <a:buNone/>
-            </a:pPr>
             <a:r>
               <a:rPr lang="en-US" sz="1100" b="1" dirty="0">
                 <a:solidFill>
@@ -17617,9 +17350,6 @@
               </a:rPr>
               <a:t>mirror the mouth shape</a:t>
             </a:r>
-            <a:pPr algn="ctr" indent="0" marL="0">
-              <a:buNone/>
-            </a:pPr>
             <a:r>
               <a:rPr lang="en-US" sz="1100" dirty="0">
                 <a:solidFill>
@@ -17967,9 +17697,6 @@
               </a:rPr>
               <a:t>Write </a:t>
             </a:r>
-            <a:pPr algn="l" indent="0" marL="0">
-              <a:buNone/>
-            </a:pPr>
             <a:r>
               <a:rPr lang="en-US" sz="1000" b="1" dirty="0">
                 <a:solidFill>
@@ -17981,9 +17708,6 @@
               </a:rPr>
               <a:t>A</a:t>
             </a:r>
-            <a:pPr algn="l" indent="0" marL="0">
-              <a:buNone/>
-            </a:pPr>
             <a:r>
               <a:rPr lang="en-US" sz="1000" dirty="0">
                 <a:solidFill>
@@ -17995,9 +17719,6 @@
               </a:rPr>
               <a:t> if you hear ao · Write </a:t>
             </a:r>
-            <a:pPr algn="l" indent="0" marL="0">
-              <a:buNone/>
-            </a:pPr>
             <a:r>
               <a:rPr lang="en-US" sz="1000" b="1" dirty="0">
                 <a:solidFill>
@@ -18009,9 +17730,6 @@
               </a:rPr>
               <a:t>O</a:t>
             </a:r>
-            <a:pPr algn="l" indent="0" marL="0">
-              <a:buNone/>
-            </a:pPr>
             <a:r>
               <a:rPr lang="en-US" sz="1000" dirty="0">
                 <a:solidFill>
@@ -20900,9 +20618,6 @@
               </a:rPr>
               <a:t>Teacher says one word from each pair — students write </a:t>
             </a:r>
-            <a:pPr algn="ctr" indent="0" marL="0">
-              <a:buNone/>
-            </a:pPr>
             <a:r>
               <a:rPr lang="en-US" sz="1100" b="1" dirty="0">
                 <a:solidFill>
@@ -20914,9 +20629,6 @@
               </a:rPr>
               <a:t>A</a:t>
             </a:r>
-            <a:pPr algn="ctr" indent="0" marL="0">
-              <a:buNone/>
-            </a:pPr>
             <a:r>
               <a:rPr lang="en-US" sz="1100" dirty="0">
                 <a:solidFill>
@@ -20928,9 +20640,6 @@
               </a:rPr>
               <a:t> or </a:t>
             </a:r>
-            <a:pPr algn="ctr" indent="0" marL="0">
-              <a:buNone/>
-            </a:pPr>
             <a:r>
               <a:rPr lang="en-US" sz="1100" b="1" dirty="0">
                 <a:solidFill>
@@ -20942,9 +20651,6 @@
               </a:rPr>
               <a:t>O</a:t>
             </a:r>
-            <a:pPr algn="ctr" indent="0" marL="0">
-              <a:buNone/>
-            </a:pPr>
             <a:r>
               <a:rPr lang="en-US" sz="1100" dirty="0">
                 <a:solidFill>
@@ -21451,15 +21157,6 @@
               </a:rPr>
               <a:t>Does </a:t>
             </a:r>
-            <a:pPr algn="l" indent="0" marL="0">
-              <a:lnSpc>
-                <a:spcPts val="1755"/>
-              </a:lnSpc>
-              <a:spcAft>
-                <a:spcPts val="600"/>
-              </a:spcAft>
-              <a:buNone/>
-            </a:pPr>
             <a:r>
               <a:rPr lang="en-US" sz="1300" b="1" dirty="0">
                 <a:solidFill>
@@ -21471,15 +21168,6 @@
               </a:rPr>
               <a:t>爱好</a:t>
             </a:r>
-            <a:pPr algn="l" indent="0" marL="0">
-              <a:lnSpc>
-                <a:spcPts val="1755"/>
-              </a:lnSpc>
-              <a:spcAft>
-                <a:spcPts val="600"/>
-              </a:spcAft>
-              <a:buNone/>
-            </a:pPr>
             <a:r>
               <a:rPr lang="en-US" sz="1300" dirty="0">
                 <a:solidFill>
@@ -21491,15 +21179,6 @@
               </a:rPr>
               <a:t> contain </a:t>
             </a:r>
-            <a:pPr algn="l" indent="0" marL="0">
-              <a:lnSpc>
-                <a:spcPts val="1755"/>
-              </a:lnSpc>
-              <a:spcAft>
-                <a:spcPts val="600"/>
-              </a:spcAft>
-              <a:buNone/>
-            </a:pPr>
             <a:r>
               <a:rPr lang="en-US" sz="1300" b="1" dirty="0">
                 <a:solidFill>
@@ -21511,15 +21190,6 @@
               </a:rPr>
               <a:t>ao</a:t>
             </a:r>
-            <a:pPr algn="l" indent="0" marL="0">
-              <a:lnSpc>
-                <a:spcPts val="1755"/>
-              </a:lnSpc>
-              <a:spcAft>
-                <a:spcPts val="600"/>
-              </a:spcAft>
-              <a:buNone/>
-            </a:pPr>
             <a:r>
               <a:rPr lang="en-US" sz="1300" dirty="0">
                 <a:solidFill>
@@ -21531,15 +21201,6 @@
               </a:rPr>
               <a:t> or </a:t>
             </a:r>
-            <a:pPr algn="l" indent="0" marL="0">
-              <a:lnSpc>
-                <a:spcPts val="1755"/>
-              </a:lnSpc>
-              <a:spcAft>
-                <a:spcPts val="600"/>
-              </a:spcAft>
-              <a:buNone/>
-            </a:pPr>
             <a:r>
               <a:rPr lang="en-US" sz="1300" b="1" dirty="0">
                 <a:solidFill>
@@ -21551,15 +21212,6 @@
               </a:rPr>
               <a:t>ou</a:t>
             </a:r>
-            <a:pPr algn="l" indent="0" marL="0">
-              <a:lnSpc>
-                <a:spcPts val="1755"/>
-              </a:lnSpc>
-              <a:spcAft>
-                <a:spcPts val="600"/>
-              </a:spcAft>
-              <a:buNone/>
-            </a:pPr>
             <a:r>
               <a:rPr lang="en-US" sz="1300" dirty="0">
                 <a:solidFill>
@@ -21766,15 +21418,6 @@
               </a:rPr>
               <a:t>Show me the </a:t>
             </a:r>
-            <a:pPr algn="l" indent="0" marL="0">
-              <a:lnSpc>
-                <a:spcPts val="1755"/>
-              </a:lnSpc>
-              <a:spcAft>
-                <a:spcPts val="600"/>
-              </a:spcAft>
-              <a:buNone/>
-            </a:pPr>
             <a:r>
               <a:rPr lang="en-US" sz="1300" b="1" dirty="0">
                 <a:solidFill>
@@ -21786,15 +21429,6 @@
               </a:rPr>
               <a:t>ao</a:t>
             </a:r>
-            <a:pPr algn="l" indent="0" marL="0">
-              <a:lnSpc>
-                <a:spcPts val="1755"/>
-              </a:lnSpc>
-              <a:spcAft>
-                <a:spcPts val="600"/>
-              </a:spcAft>
-              <a:buNone/>
-            </a:pPr>
             <a:r>
               <a:rPr lang="en-US" sz="1300" dirty="0">
                 <a:solidFill>
@@ -21806,15 +21440,6 @@
               </a:rPr>
               <a:t> mouth shape. Now </a:t>
             </a:r>
-            <a:pPr algn="l" indent="0" marL="0">
-              <a:lnSpc>
-                <a:spcPts val="1755"/>
-              </a:lnSpc>
-              <a:spcAft>
-                <a:spcPts val="600"/>
-              </a:spcAft>
-              <a:buNone/>
-            </a:pPr>
             <a:r>
               <a:rPr lang="en-US" sz="1300" b="1" dirty="0">
                 <a:solidFill>
@@ -21826,15 +21451,6 @@
               </a:rPr>
               <a:t>ou</a:t>
             </a:r>
-            <a:pPr algn="l" indent="0" marL="0">
-              <a:lnSpc>
-                <a:spcPts val="1755"/>
-              </a:lnSpc>
-              <a:spcAft>
-                <a:spcPts val="600"/>
-              </a:spcAft>
-              <a:buNone/>
-            </a:pPr>
             <a:r>
               <a:rPr lang="en-US" sz="1300" dirty="0">
                 <a:solidFill>
@@ -22041,15 +21657,6 @@
               </a:rPr>
               <a:t>Write </a:t>
             </a:r>
-            <a:pPr algn="l" indent="0" marL="0">
-              <a:lnSpc>
-                <a:spcPts val="1755"/>
-              </a:lnSpc>
-              <a:spcAft>
-                <a:spcPts val="600"/>
-              </a:spcAft>
-              <a:buNone/>
-            </a:pPr>
             <a:r>
               <a:rPr lang="en-US" sz="1300" b="1" dirty="0">
                 <a:solidFill>
@@ -22061,15 +21668,6 @@
               </a:rPr>
               <a:t>A</a:t>
             </a:r>
-            <a:pPr algn="l" indent="0" marL="0">
-              <a:lnSpc>
-                <a:spcPts val="1755"/>
-              </a:lnSpc>
-              <a:spcAft>
-                <a:spcPts val="600"/>
-              </a:spcAft>
-              <a:buNone/>
-            </a:pPr>
             <a:r>
               <a:rPr lang="en-US" sz="1300" dirty="0">
                 <a:solidFill>
@@ -22081,15 +21679,6 @@
               </a:rPr>
               <a:t> if ao, </a:t>
             </a:r>
-            <a:pPr algn="l" indent="0" marL="0">
-              <a:lnSpc>
-                <a:spcPts val="1755"/>
-              </a:lnSpc>
-              <a:spcAft>
-                <a:spcPts val="600"/>
-              </a:spcAft>
-              <a:buNone/>
-            </a:pPr>
             <a:r>
               <a:rPr lang="en-US" sz="1300" b="1" dirty="0">
                 <a:solidFill>
@@ -22101,15 +21690,6 @@
               </a:rPr>
               <a:t>O</a:t>
             </a:r>
-            <a:pPr algn="l" indent="0" marL="0">
-              <a:lnSpc>
-                <a:spcPts val="1755"/>
-              </a:lnSpc>
-              <a:spcAft>
-                <a:spcPts val="600"/>
-              </a:spcAft>
-              <a:buNone/>
-            </a:pPr>
             <a:r>
               <a:rPr lang="en-US" sz="1300" dirty="0">
                 <a:solidFill>
@@ -25042,12 +24622,6 @@
               </a:rPr>
               <a:t>Listen</a:t>
             </a:r>
-            <a:pPr algn="l" indent="0" marL="0">
-              <a:lnSpc>
-                <a:spcPts val="1540"/>
-              </a:lnSpc>
-              <a:buNone/>
-            </a:pPr>
             <a:r>
               <a:rPr lang="en-US" sz="1100" dirty="0">
                 <a:solidFill>
@@ -25176,12 +24750,6 @@
               </a:rPr>
               <a:t>Tick</a:t>
             </a:r>
-            <a:pPr algn="l" indent="0" marL="0">
-              <a:lnSpc>
-                <a:spcPts val="1540"/>
-              </a:lnSpc>
-              <a:buNone/>
-            </a:pPr>
             <a:r>
               <a:rPr lang="en-US" sz="1100" dirty="0">
                 <a:solidFill>
@@ -25193,12 +24761,6 @@
               </a:rPr>
               <a:t> the column — </a:t>
             </a:r>
-            <a:pPr algn="l" indent="0" marL="0">
-              <a:lnSpc>
-                <a:spcPts val="1540"/>
-              </a:lnSpc>
-              <a:buNone/>
-            </a:pPr>
             <a:r>
               <a:rPr lang="en-US" sz="1100" b="1" dirty="0">
                 <a:solidFill>
@@ -25210,12 +24772,6 @@
               </a:rPr>
               <a:t>ao</a:t>
             </a:r>
-            <a:pPr algn="l" indent="0" marL="0">
-              <a:lnSpc>
-                <a:spcPts val="1540"/>
-              </a:lnSpc>
-              <a:buNone/>
-            </a:pPr>
             <a:r>
               <a:rPr lang="en-US" sz="1100" dirty="0">
                 <a:solidFill>
@@ -25227,12 +24783,6 @@
               </a:rPr>
               <a:t> or </a:t>
             </a:r>
-            <a:pPr algn="l" indent="0" marL="0">
-              <a:lnSpc>
-                <a:spcPts val="1540"/>
-              </a:lnSpc>
-              <a:buNone/>
-            </a:pPr>
             <a:r>
               <a:rPr lang="en-US" sz="1100" b="1" dirty="0">
                 <a:solidFill>
@@ -25244,12 +24794,6 @@
               </a:rPr>
               <a:t>ou</a:t>
             </a:r>
-            <a:pPr algn="l" indent="0" marL="0">
-              <a:lnSpc>
-                <a:spcPts val="1540"/>
-              </a:lnSpc>
-              <a:buNone/>
-            </a:pPr>
             <a:r>
               <a:rPr lang="en-US" sz="1100" dirty="0">
                 <a:solidFill>
@@ -25378,12 +24922,6 @@
               </a:rPr>
               <a:t>Check</a:t>
             </a:r>
-            <a:pPr algn="l" indent="0" marL="0">
-              <a:lnSpc>
-                <a:spcPts val="1540"/>
-              </a:lnSpc>
-              <a:buNone/>
-            </a:pPr>
             <a:r>
               <a:rPr lang="en-US" sz="1100" dirty="0">
                 <a:solidFill>
@@ -26303,12 +25841,6 @@
               </a:rPr>
               <a:t>Teacher says each word at </a:t>
             </a:r>
-            <a:pPr algn="l" indent="0" marL="0">
-              <a:spcAft>
-                <a:spcPts val="1000"/>
-              </a:spcAft>
-              <a:buNone/>
-            </a:pPr>
             <a:r>
               <a:rPr lang="en-US" sz="1000" b="1" dirty="0">
                 <a:solidFill>
@@ -26320,12 +25852,6 @@
               </a:rPr>
               <a:t>natural pace</a:t>
             </a:r>
-            <a:pPr algn="l" indent="0" marL="0">
-              <a:spcAft>
-                <a:spcPts val="1000"/>
-              </a:spcAft>
-              <a:buNone/>
-            </a:pPr>
             <a:r>
               <a:rPr lang="en-US" sz="1000" dirty="0">
                 <a:solidFill>
@@ -26337,12 +25863,6 @@
               </a:rPr>
               <a:t> — write </a:t>
             </a:r>
-            <a:pPr algn="l" indent="0" marL="0">
-              <a:spcAft>
-                <a:spcPts val="1000"/>
-              </a:spcAft>
-              <a:buNone/>
-            </a:pPr>
             <a:r>
               <a:rPr lang="en-US" sz="1000" b="1" dirty="0">
                 <a:solidFill>
@@ -26354,12 +25874,6 @@
               </a:rPr>
               <a:t>ao</a:t>
             </a:r>
-            <a:pPr algn="l" indent="0" marL="0">
-              <a:spcAft>
-                <a:spcPts val="1000"/>
-              </a:spcAft>
-              <a:buNone/>
-            </a:pPr>
             <a:r>
               <a:rPr lang="en-US" sz="1000" dirty="0">
                 <a:solidFill>
@@ -26371,12 +25885,6 @@
               </a:rPr>
               <a:t> or </a:t>
             </a:r>
-            <a:pPr algn="l" indent="0" marL="0">
-              <a:spcAft>
-                <a:spcPts val="1000"/>
-              </a:spcAft>
-              <a:buNone/>
-            </a:pPr>
             <a:r>
               <a:rPr lang="en-US" sz="1000" b="1" dirty="0">
                 <a:solidFill>
@@ -26388,12 +25896,6 @@
               </a:rPr>
               <a:t>ou</a:t>
             </a:r>
-            <a:pPr algn="l" indent="0" marL="0">
-              <a:spcAft>
-                <a:spcPts val="1000"/>
-              </a:spcAft>
-              <a:buNone/>
-            </a:pPr>
             <a:r>
               <a:rPr lang="en-US" sz="1000" dirty="0">
                 <a:solidFill>
@@ -28085,12 +27587,6 @@
               </a:rPr>
               <a:t>Write </a:t>
             </a:r>
-            <a:pPr algn="l" indent="0" marL="0">
-              <a:lnSpc>
-                <a:spcPts val="1540"/>
-              </a:lnSpc>
-              <a:buNone/>
-            </a:pPr>
             <a:r>
               <a:rPr lang="en-US" sz="1100" b="1" dirty="0">
                 <a:solidFill>
@@ -28102,12 +27598,6 @@
               </a:rPr>
               <a:t>ao</a:t>
             </a:r>
-            <a:pPr algn="l" indent="0" marL="0">
-              <a:lnSpc>
-                <a:spcPts val="1540"/>
-              </a:lnSpc>
-              <a:buNone/>
-            </a:pPr>
             <a:r>
               <a:rPr lang="en-US" sz="1100" dirty="0">
                 <a:solidFill>
@@ -28119,12 +27609,6 @@
               </a:rPr>
               <a:t> or </a:t>
             </a:r>
-            <a:pPr algn="l" indent="0" marL="0">
-              <a:lnSpc>
-                <a:spcPts val="1540"/>
-              </a:lnSpc>
-              <a:buNone/>
-            </a:pPr>
             <a:r>
               <a:rPr lang="en-US" sz="1100" b="1" dirty="0">
                 <a:solidFill>
@@ -28136,12 +27620,6 @@
               </a:rPr>
               <a:t>ou</a:t>
             </a:r>
-            <a:pPr algn="l" indent="0" marL="0">
-              <a:lnSpc>
-                <a:spcPts val="1540"/>
-              </a:lnSpc>
-              <a:buNone/>
-            </a:pPr>
             <a:r>
               <a:rPr lang="en-US" sz="1100" dirty="0">
                 <a:solidFill>
@@ -28273,12 +27751,6 @@
               </a:rPr>
               <a:t>Shout </a:t>
             </a:r>
-            <a:pPr algn="l" indent="0" marL="0">
-              <a:lnSpc>
-                <a:spcPts val="1540"/>
-              </a:lnSpc>
-              <a:buNone/>
-            </a:pPr>
             <a:r>
               <a:rPr lang="en-US" sz="1100" b="1" dirty="0">
                 <a:solidFill>
@@ -28290,12 +27762,6 @@
               </a:rPr>
               <a:t>ao</a:t>
             </a:r>
-            <a:pPr algn="l" indent="0" marL="0">
-              <a:lnSpc>
-                <a:spcPts val="1540"/>
-              </a:lnSpc>
-              <a:buNone/>
-            </a:pPr>
             <a:r>
               <a:rPr lang="en-US" sz="1100" dirty="0">
                 <a:solidFill>
@@ -28307,12 +27773,6 @@
               </a:rPr>
               <a:t> or </a:t>
             </a:r>
-            <a:pPr algn="l" indent="0" marL="0">
-              <a:lnSpc>
-                <a:spcPts val="1540"/>
-              </a:lnSpc>
-              <a:buNone/>
-            </a:pPr>
             <a:r>
               <a:rPr lang="en-US" sz="1100" b="1" dirty="0">
                 <a:solidFill>
@@ -28324,12 +27784,6 @@
               </a:rPr>
               <a:t>ou</a:t>
             </a:r>
-            <a:pPr algn="l" indent="0" marL="0">
-              <a:lnSpc>
-                <a:spcPts val="1540"/>
-              </a:lnSpc>
-              <a:buNone/>
-            </a:pPr>
             <a:r>
               <a:rPr lang="en-US" sz="1100" dirty="0">
                 <a:solidFill>
